--- a/memory_and_generative_models/memory_and_generative_models_lecture_3.pptx
+++ b/memory_and_generative_models/memory_and_generative_models_lecture_3.pptx
@@ -599,7 +599,7 @@
           <a:p/>
           <a:p>
             <a:r>
-              <a:t>These regions overlap the **default mode network**. But the network’s regions are active in many tasks, from remembering to language to judging other people. So the network is not specific to remembering and imagining, and finding it active does not show that someone is doing either.</a:t>
+              <a:t>These regions overlap the **default mode network**. But the network’s regions are active in many tasks, from remembering to language to judging other people. So the network is not specific to remembering and imagining.</a:t>
             </a:r>
           </a:p>
           <a:p/>
@@ -612,7 +612,7 @@
           <a:p/>
           <a:p>
             <a:r>
-              <a:t>In one study, people watched and then recalled short films of two actors in four places, two cafés and two grocery stores. One cortical network represented the place, and another the person. The medial prefrontal cortex represented the kind of situation, café or store. The hippocampus came closest to representing each particular event. The researchers propose that the cortex represents reusable parts of events, which can be recombined. That fits the idea from the second lecture that an occasion is rebuilt from general parts plus a few specifics.</a:t>
+              <a:t>In one study, people watched and then recalled short films of two actors in four places, two cafés and two grocery stores. One cortical network represented the place, and another the person. The medial prefrontal cortex represented the kind of situation, café or store. The hippocampus came closest to representing each particular event. The researchers propose that the cortex represents reusable parts of events, which can be recombined.</a:t>
             </a:r>
           </a:p>
         </p:txBody>
@@ -883,7 +883,7 @@
           <a:p/>
           <a:p>
             <a:r>
-              <a:t>Elisabeth Murray, Steven Wise, and Kim Graham sort memory instead by what each system represents, and by the ancestor in which it first appeared. Their systems run from reinforcement memory in early animals to social-subjective memory in the human line. They call the scheme an *evolutionary accretion model*, since each system was added to those before it. They are the research group from the second lecture who conclude that only humans have explicit memory. On their account, explicit memory arises when a representation of oneself becomes part of what is remembered. They call the model a “first word” rather than a “last word”, and it has not replaced the standard taxonomy.</a:t>
+              <a:t>Elisabeth Murray, Steven Wise, and Kim Graham sort memory instead by what each system represents, and by the ancestor in which it first appeared. Their systems run from reinforcement memory in early animals to social-subjective memory in the human line. They call the scheme an *evolutionary accretion model*, since each system was added to those before it. They are the research group from the second lecture who conclude that only humans have explicit memory. That conclusion is a minority view. On their account, explicit memory arises when a representation of oneself becomes part of what is remembered. They call the model a “first word” rather than a “last word”, and it has not replaced the standard taxonomy.</a:t>
             </a:r>
           </a:p>
           <a:p/>
@@ -895,7 +895,7 @@
           <a:p/>
           <a:p>
             <a:r>
-              <a:t>Now back to the early mammal in its nest before dawn, with one log emptied, a second log with beetles left, and something large at the edge of a clearing. Experience can change an animal in two ways, and the two can coexist. It can change a tendency to respond. And it can leave accessible content, information that can be accessed later and combined with whatever the animal then needs. The animal needs learned tendencies to respond, such as avoiding a food that once made it sick. And it needs accessible content about which log it emptied, for a choice that depends on how hungry it is the next night.</a:t>
+              <a:t>Now back to an early mammal in its nest before dawn, with one log emptied, a second log with beetles left, and something large at the edge of a clearing. Experience can change an animal in two ways, and the two can coexist. It can change a tendency to respond. And it can leave accessible content, information that can be accessed later and combined with whatever the animal then needs. The animal needs learned tendencies to respond, such as avoiding a food that once made it sick. And it needs accessible content about which log it emptied, for a choice that depends on how hungry it is the next night.</a:t>
             </a:r>
           </a:p>
           <a:p/>
@@ -1438,7 +1438,7 @@
           <a:p/>
           <a:p>
             <a:r>
-              <a:t>In the second lecture, we described two ways a system can make a state last: in continuing activity, or in a changed connection. Persistent activity is the first way, since the neurons keep firing. The fly’s heading ring from Module 9 is a second case: its single bump of activity stays in place while the fly stands still. Goldman-Rakic argued that what is remembered for longer than tens of seconds depends on other mechanisms, such as the long-term potentiation from Module 5.</a:t>
+              <a:t>In the second lecture, we described two ways a system can make a state last: in continuing activity, or in a changed connection. Persistent activity is the first way, since the neurons continue to fire. The fly’s heading ring from Module 9 is a second case: its single bump of activity stays in place while the fly stands still. Goldman-Rakic argued that what is remembered for longer than tens of seconds depends on other mechanisms. One candidate was the long-term potentiation from Module 5.</a:t>
             </a:r>
           </a:p>
           <a:p/>
@@ -1457,7 +1457,7 @@
           <a:p/>
           <a:p>
             <a:r>
-              <a:t>So working memory is not simply continuing activity. For a few seconds, activity and short-lived changes in connections may both maintain what is remembered.</a:t>
+              <a:t>So for a few seconds, activity and short-lived changes in connections may both maintain what is remembered.</a:t>
             </a:r>
           </a:p>
         </p:txBody>
@@ -1621,7 +1621,7 @@
           <a:p/>
           <a:p>
             <a:r>
-              <a:t>In a classic study, researchers recorded many CA1 cells while three rats searched for food, and during sleep before and after. Many were place cells. A **place cell**, from Module 9, fires when the animal is in one part of its surroundings, whichever way it is facing. Pairs of place cells that fired together during the task fired together more often in slow-wave sleep after it than before it. That measure could not reveal order. Researchers later found the order too. In slow-wave sleep, place-cell sequences from a run recurred, in order, much faster than the run, during **sharp-wave ripples**. Complementary learning systems propose replay of this kind.</a:t>
+              <a:t>In a classic study, researchers recorded many CA1 cells while three rats searched for food, and during sleep before and after. Many were place cells. A **place cell**, from Module 9, fires when the animal is in one part of its surroundings, whichever way it is facing. Pairs of place cells that fired together during the task fired together more often in slow-wave sleep after it than before it. That measure could not reveal order. Researchers later found the order too. In slow-wave sleep, place-cell sequences from a run recurred, in order, much faster than the run, during **sharp-wave ripples**. In the complementary learning systems account from the second lecture, replay is how the fast learner presents occasions again to the slow learner.</a:t>
             </a:r>
           </a:p>
           <a:p/>
